--- a/AI-CoE-Partner-Recruitment-Kit.pptx
+++ b/AI-CoE-Partner-Recruitment-Kit.pptx
@@ -751,7 +751,7 @@
               <a:t>Use this slide proactively — do not wait for the partner to ask. Channel transparency is how we build trust.
 Key message: In a small number of accounts (sovereign, regulated, customer-demanded Microsoft-led), ISD — Microsoft's paid delivery arm — will prime the SoW. Partner margin is preserved through subcontract terms, and the Partner PDM is informed before the customer is.
 The three-model clarity:
-• Default (Stream 2) — partner primes the SoW. This is the bulk of the motion.
+• Default (Stream 3) — partner primes the SoW. This is the bulk of the motion.
 • Model B (ISD-led + Partner) — ISD primes, partner subcontracts. Used when customer wants Microsoft accountability + partner brings vertical IP or capacity.
 • Model C (ISD + ICSU + Partner) — flagship regulated accounts. Three-party governance, one SoW, partner still wins defined delivery scope.
 What partners get in B/C:
@@ -1030,7 +1030,7 @@
             <a:r>
               <a:rPr lang="en-US" dirty="0"/>
               <a:t>Walk each card as a risk-reducer for the partner.
-1. Turnkey asset pack: they do not need to build CoE IP from scratch. Six published Frontier modules, ready to use.
+1. Turnkey asset pack: they do not need to build CoE IP from scratch. Five published Frontier modules, ready to use.
 2. Technical wingman: Microsoft CSAs share delivery risk. The partner is not alone on a complex engagement.
 3. Commercial levers: MAICPP, ESI, and MCI reduce the partner's cost of entry.
 4. Co-sell motion: Partner Center referrals give them pipeline they did not have to source themselves.
@@ -7473,7 +7473,7 @@
                 <a:ea typeface="Segoe UI" pitchFamily="34" charset="-122"/>
                 <a:cs typeface="Segoe UI" pitchFamily="34" charset="-120"/>
               </a:rPr>
-              <a:t>Partner-led (Stream 2)</a:t>
+              <a:t>Partner-led (Stream 3)</a:t>
             </a:r>
             <a:endParaRPr lang="en-US" sz="1400" dirty="0"/>
           </a:p>
@@ -10602,7 +10602,7 @@
                 <a:ea typeface="Segoe UI" pitchFamily="34" charset="-122"/>
                 <a:cs typeface="Segoe UI" pitchFamily="34" charset="-120"/>
               </a:rPr>
-              <a:t>Frontier CoE decks — six published modules covering Business, Tech, AI, Culture, Governance</a:t>
+              <a:t>Frontier CoE decks — five published modules covering Business Strategy, Organization &amp; Culture, AI Strategy &amp; Experience, Technology &amp; Data, Governance &amp; Security</a:t>
             </a:r>
             <a:endParaRPr lang="en-US" sz="1100" dirty="0"/>
           </a:p>

--- a/AI-CoE-Partner-Recruitment-Kit.pptx
+++ b/AI-CoE-Partner-Recruitment-Kit.pptx
@@ -2353,6 +2353,226 @@
           </a:p>
         </p:txBody>
       </p:sp>
+      <p:sp>
+        <p:nvSpPr>
+          <p:cNvPr id="13" name="AICOE_GEO_ACCENT_Right Triangle 12"/>
+          <p:cNvSpPr/>
+          <p:nvPr/>
+        </p:nvSpPr>
+        <p:spPr>
+          <a:xfrm>
+            <a:off x="11369040" y="445770"/>
+            <a:ext cx="822960" cy="822960"/>
+          </a:xfrm>
+          <a:prstGeom prst="rtTriangle">
+            <a:avLst/>
+          </a:prstGeom>
+          <a:solidFill>
+            <a:srgbClr val="0B1F3A"/>
+          </a:solidFill>
+          <a:ln>
+            <a:noFill/>
+          </a:ln>
+          <a:effectLst/>
+        </p:spPr>
+        <p:style>
+          <a:lnRef idx="1">
+            <a:schemeClr val="accent1"/>
+          </a:lnRef>
+          <a:fillRef idx="3">
+            <a:schemeClr val="accent1"/>
+          </a:fillRef>
+          <a:effectRef idx="2">
+            <a:schemeClr val="accent1"/>
+          </a:effectRef>
+          <a:fontRef idx="minor">
+            <a:schemeClr val="lt1"/>
+          </a:fontRef>
+        </p:style>
+        <p:txBody>
+          <a:bodyPr rtlCol="0" anchor="ctr"/>
+          <a:lstStyle/>
+          <a:p>
+            <a:pPr algn="ctr"/>
+          </a:p>
+        </p:txBody>
+      </p:sp>
+      <p:sp>
+        <p:nvSpPr>
+          <p:cNvPr id="14" name="AICOE_GEO_ACCENT_Right Triangle 13"/>
+          <p:cNvSpPr/>
+          <p:nvPr/>
+        </p:nvSpPr>
+        <p:spPr>
+          <a:xfrm rot="10800000">
+            <a:off x="11369040" y="2160270"/>
+            <a:ext cx="822960" cy="822960"/>
+          </a:xfrm>
+          <a:prstGeom prst="rtTriangle">
+            <a:avLst/>
+          </a:prstGeom>
+          <a:solidFill>
+            <a:srgbClr val="50E6FF"/>
+          </a:solidFill>
+          <a:ln>
+            <a:noFill/>
+          </a:ln>
+          <a:effectLst/>
+        </p:spPr>
+        <p:style>
+          <a:lnRef idx="1">
+            <a:schemeClr val="accent1"/>
+          </a:lnRef>
+          <a:fillRef idx="3">
+            <a:schemeClr val="accent1"/>
+          </a:fillRef>
+          <a:effectRef idx="2">
+            <a:schemeClr val="accent1"/>
+          </a:effectRef>
+          <a:fontRef idx="minor">
+            <a:schemeClr val="lt1"/>
+          </a:fontRef>
+        </p:style>
+        <p:txBody>
+          <a:bodyPr rtlCol="0" anchor="ctr"/>
+          <a:lstStyle/>
+          <a:p>
+            <a:pPr algn="ctr"/>
+          </a:p>
+        </p:txBody>
+      </p:sp>
+      <p:sp>
+        <p:nvSpPr>
+          <p:cNvPr id="15" name="AICOE_GEO_ACCENT_Right Triangle 14"/>
+          <p:cNvSpPr/>
+          <p:nvPr/>
+        </p:nvSpPr>
+        <p:spPr>
+          <a:xfrm>
+            <a:off x="11369040" y="3874770"/>
+            <a:ext cx="822960" cy="822960"/>
+          </a:xfrm>
+          <a:prstGeom prst="rtTriangle">
+            <a:avLst/>
+          </a:prstGeom>
+          <a:solidFill>
+            <a:srgbClr val="0067B8"/>
+          </a:solidFill>
+          <a:ln>
+            <a:noFill/>
+          </a:ln>
+          <a:effectLst/>
+        </p:spPr>
+        <p:style>
+          <a:lnRef idx="1">
+            <a:schemeClr val="accent1"/>
+          </a:lnRef>
+          <a:fillRef idx="3">
+            <a:schemeClr val="accent1"/>
+          </a:fillRef>
+          <a:effectRef idx="2">
+            <a:schemeClr val="accent1"/>
+          </a:effectRef>
+          <a:fontRef idx="minor">
+            <a:schemeClr val="lt1"/>
+          </a:fontRef>
+        </p:style>
+        <p:txBody>
+          <a:bodyPr rtlCol="0" anchor="ctr"/>
+          <a:lstStyle/>
+          <a:p>
+            <a:pPr algn="ctr"/>
+          </a:p>
+        </p:txBody>
+      </p:sp>
+      <p:sp>
+        <p:nvSpPr>
+          <p:cNvPr id="16" name="AICOE_GEO_ACCENT_Right Triangle 15"/>
+          <p:cNvSpPr/>
+          <p:nvPr/>
+        </p:nvSpPr>
+        <p:spPr>
+          <a:xfrm rot="5400000">
+            <a:off x="11369040" y="5589270"/>
+            <a:ext cx="822960" cy="822960"/>
+          </a:xfrm>
+          <a:prstGeom prst="rtTriangle">
+            <a:avLst/>
+          </a:prstGeom>
+          <a:solidFill>
+            <a:srgbClr val="50E6FF"/>
+          </a:solidFill>
+          <a:ln>
+            <a:noFill/>
+          </a:ln>
+          <a:effectLst/>
+        </p:spPr>
+        <p:style>
+          <a:lnRef idx="1">
+            <a:schemeClr val="accent1"/>
+          </a:lnRef>
+          <a:fillRef idx="3">
+            <a:schemeClr val="accent1"/>
+          </a:fillRef>
+          <a:effectRef idx="2">
+            <a:schemeClr val="accent1"/>
+          </a:effectRef>
+          <a:fontRef idx="minor">
+            <a:schemeClr val="lt1"/>
+          </a:fontRef>
+        </p:style>
+        <p:txBody>
+          <a:bodyPr rtlCol="0" anchor="ctr"/>
+          <a:lstStyle/>
+          <a:p>
+            <a:pPr algn="ctr"/>
+          </a:p>
+        </p:txBody>
+      </p:sp>
+      <p:sp>
+        <p:nvSpPr>
+          <p:cNvPr id="17" name="AICOE_GEO_ACCENT_Rectangle 16"/>
+          <p:cNvSpPr/>
+          <p:nvPr/>
+        </p:nvSpPr>
+        <p:spPr>
+          <a:xfrm>
+            <a:off x="11295888" y="0"/>
+            <a:ext cx="73152" cy="6858000"/>
+          </a:xfrm>
+          <a:prstGeom prst="rect">
+            <a:avLst/>
+          </a:prstGeom>
+          <a:solidFill>
+            <a:srgbClr val="0B1F3A"/>
+          </a:solidFill>
+          <a:ln>
+            <a:noFill/>
+          </a:ln>
+          <a:effectLst/>
+        </p:spPr>
+        <p:style>
+          <a:lnRef idx="1">
+            <a:schemeClr val="accent1"/>
+          </a:lnRef>
+          <a:fillRef idx="3">
+            <a:schemeClr val="accent1"/>
+          </a:fillRef>
+          <a:effectRef idx="2">
+            <a:schemeClr val="accent1"/>
+          </a:effectRef>
+          <a:fontRef idx="minor">
+            <a:schemeClr val="lt1"/>
+          </a:fontRef>
+        </p:style>
+        <p:txBody>
+          <a:bodyPr rtlCol="0" anchor="ctr"/>
+          <a:lstStyle/>
+          <a:p>
+            <a:pPr algn="ctr"/>
+          </a:p>
+        </p:txBody>
+      </p:sp>
     </p:spTree>
   </p:cSld>
   <p:clrMapOvr>
@@ -3499,6 +3719,94 @@
           </a:p>
         </p:txBody>
       </p:sp>
+      <p:sp>
+        <p:nvSpPr>
+          <p:cNvPr id="32" name="AICOE_GEO_ACCENT_Right Triangle 31"/>
+          <p:cNvSpPr/>
+          <p:nvPr/>
+        </p:nvSpPr>
+        <p:spPr>
+          <a:xfrm rot="5400000">
+            <a:off x="11762232" y="109728"/>
+            <a:ext cx="320040" cy="320040"/>
+          </a:xfrm>
+          <a:prstGeom prst="rtTriangle">
+            <a:avLst/>
+          </a:prstGeom>
+          <a:solidFill>
+            <a:srgbClr val="0B1F3A"/>
+          </a:solidFill>
+          <a:ln>
+            <a:noFill/>
+          </a:ln>
+          <a:effectLst/>
+        </p:spPr>
+        <p:style>
+          <a:lnRef idx="1">
+            <a:schemeClr val="accent1"/>
+          </a:lnRef>
+          <a:fillRef idx="3">
+            <a:schemeClr val="accent1"/>
+          </a:fillRef>
+          <a:effectRef idx="2">
+            <a:schemeClr val="accent1"/>
+          </a:effectRef>
+          <a:fontRef idx="minor">
+            <a:schemeClr val="lt1"/>
+          </a:fontRef>
+        </p:style>
+        <p:txBody>
+          <a:bodyPr rtlCol="0" anchor="ctr"/>
+          <a:lstStyle/>
+          <a:p>
+            <a:pPr algn="ctr"/>
+          </a:p>
+        </p:txBody>
+      </p:sp>
+      <p:sp>
+        <p:nvSpPr>
+          <p:cNvPr id="33" name="AICOE_GEO_ACCENT_Right Triangle 32"/>
+          <p:cNvSpPr/>
+          <p:nvPr/>
+        </p:nvSpPr>
+        <p:spPr>
+          <a:xfrm rot="5400000">
+            <a:off x="11874246" y="109728"/>
+            <a:ext cx="208026" cy="208026"/>
+          </a:xfrm>
+          <a:prstGeom prst="rtTriangle">
+            <a:avLst/>
+          </a:prstGeom>
+          <a:solidFill>
+            <a:srgbClr val="50E6FF"/>
+          </a:solidFill>
+          <a:ln>
+            <a:noFill/>
+          </a:ln>
+          <a:effectLst/>
+        </p:spPr>
+        <p:style>
+          <a:lnRef idx="1">
+            <a:schemeClr val="accent1"/>
+          </a:lnRef>
+          <a:fillRef idx="3">
+            <a:schemeClr val="accent1"/>
+          </a:fillRef>
+          <a:effectRef idx="2">
+            <a:schemeClr val="accent1"/>
+          </a:effectRef>
+          <a:fontRef idx="minor">
+            <a:schemeClr val="lt1"/>
+          </a:fontRef>
+        </p:style>
+        <p:txBody>
+          <a:bodyPr rtlCol="0" anchor="ctr"/>
+          <a:lstStyle/>
+          <a:p>
+            <a:pPr algn="ctr"/>
+          </a:p>
+        </p:txBody>
+      </p:sp>
     </p:spTree>
   </p:cSld>
   <p:clrMapOvr>
@@ -4825,6 +5133,94 @@
           </a:p>
         </p:txBody>
       </p:sp>
+      <p:sp>
+        <p:nvSpPr>
+          <p:cNvPr id="38" name="AICOE_GEO_ACCENT_Right Triangle 37"/>
+          <p:cNvSpPr/>
+          <p:nvPr/>
+        </p:nvSpPr>
+        <p:spPr>
+          <a:xfrm rot="5400000">
+            <a:off x="11762232" y="109728"/>
+            <a:ext cx="320040" cy="320040"/>
+          </a:xfrm>
+          <a:prstGeom prst="rtTriangle">
+            <a:avLst/>
+          </a:prstGeom>
+          <a:solidFill>
+            <a:srgbClr val="0B1F3A"/>
+          </a:solidFill>
+          <a:ln>
+            <a:noFill/>
+          </a:ln>
+          <a:effectLst/>
+        </p:spPr>
+        <p:style>
+          <a:lnRef idx="1">
+            <a:schemeClr val="accent1"/>
+          </a:lnRef>
+          <a:fillRef idx="3">
+            <a:schemeClr val="accent1"/>
+          </a:fillRef>
+          <a:effectRef idx="2">
+            <a:schemeClr val="accent1"/>
+          </a:effectRef>
+          <a:fontRef idx="minor">
+            <a:schemeClr val="lt1"/>
+          </a:fontRef>
+        </p:style>
+        <p:txBody>
+          <a:bodyPr rtlCol="0" anchor="ctr"/>
+          <a:lstStyle/>
+          <a:p>
+            <a:pPr algn="ctr"/>
+          </a:p>
+        </p:txBody>
+      </p:sp>
+      <p:sp>
+        <p:nvSpPr>
+          <p:cNvPr id="39" name="AICOE_GEO_ACCENT_Right Triangle 38"/>
+          <p:cNvSpPr/>
+          <p:nvPr/>
+        </p:nvSpPr>
+        <p:spPr>
+          <a:xfrm rot="5400000">
+            <a:off x="11874246" y="109728"/>
+            <a:ext cx="208026" cy="208026"/>
+          </a:xfrm>
+          <a:prstGeom prst="rtTriangle">
+            <a:avLst/>
+          </a:prstGeom>
+          <a:solidFill>
+            <a:srgbClr val="50E6FF"/>
+          </a:solidFill>
+          <a:ln>
+            <a:noFill/>
+          </a:ln>
+          <a:effectLst/>
+        </p:spPr>
+        <p:style>
+          <a:lnRef idx="1">
+            <a:schemeClr val="accent1"/>
+          </a:lnRef>
+          <a:fillRef idx="3">
+            <a:schemeClr val="accent1"/>
+          </a:fillRef>
+          <a:effectRef idx="2">
+            <a:schemeClr val="accent1"/>
+          </a:effectRef>
+          <a:fontRef idx="minor">
+            <a:schemeClr val="lt1"/>
+          </a:fontRef>
+        </p:style>
+        <p:txBody>
+          <a:bodyPr rtlCol="0" anchor="ctr"/>
+          <a:lstStyle/>
+          <a:p>
+            <a:pPr algn="ctr"/>
+          </a:p>
+        </p:txBody>
+      </p:sp>
     </p:spTree>
   </p:cSld>
   <p:clrMapOvr>
@@ -5509,6 +5905,94 @@
           </a:p>
         </p:txBody>
       </p:sp>
+      <p:sp>
+        <p:nvSpPr>
+          <p:cNvPr id="20" name="AICOE_GEO_ACCENT_Right Triangle 19"/>
+          <p:cNvSpPr/>
+          <p:nvPr/>
+        </p:nvSpPr>
+        <p:spPr>
+          <a:xfrm rot="5400000">
+            <a:off x="11762232" y="109728"/>
+            <a:ext cx="320040" cy="320040"/>
+          </a:xfrm>
+          <a:prstGeom prst="rtTriangle">
+            <a:avLst/>
+          </a:prstGeom>
+          <a:solidFill>
+            <a:srgbClr val="0B1F3A"/>
+          </a:solidFill>
+          <a:ln>
+            <a:noFill/>
+          </a:ln>
+          <a:effectLst/>
+        </p:spPr>
+        <p:style>
+          <a:lnRef idx="1">
+            <a:schemeClr val="accent1"/>
+          </a:lnRef>
+          <a:fillRef idx="3">
+            <a:schemeClr val="accent1"/>
+          </a:fillRef>
+          <a:effectRef idx="2">
+            <a:schemeClr val="accent1"/>
+          </a:effectRef>
+          <a:fontRef idx="minor">
+            <a:schemeClr val="lt1"/>
+          </a:fontRef>
+        </p:style>
+        <p:txBody>
+          <a:bodyPr rtlCol="0" anchor="ctr"/>
+          <a:lstStyle/>
+          <a:p>
+            <a:pPr algn="ctr"/>
+          </a:p>
+        </p:txBody>
+      </p:sp>
+      <p:sp>
+        <p:nvSpPr>
+          <p:cNvPr id="21" name="AICOE_GEO_ACCENT_Right Triangle 20"/>
+          <p:cNvSpPr/>
+          <p:nvPr/>
+        </p:nvSpPr>
+        <p:spPr>
+          <a:xfrm rot="5400000">
+            <a:off x="11874246" y="109728"/>
+            <a:ext cx="208026" cy="208026"/>
+          </a:xfrm>
+          <a:prstGeom prst="rtTriangle">
+            <a:avLst/>
+          </a:prstGeom>
+          <a:solidFill>
+            <a:srgbClr val="50E6FF"/>
+          </a:solidFill>
+          <a:ln>
+            <a:noFill/>
+          </a:ln>
+          <a:effectLst/>
+        </p:spPr>
+        <p:style>
+          <a:lnRef idx="1">
+            <a:schemeClr val="accent1"/>
+          </a:lnRef>
+          <a:fillRef idx="3">
+            <a:schemeClr val="accent1"/>
+          </a:fillRef>
+          <a:effectRef idx="2">
+            <a:schemeClr val="accent1"/>
+          </a:effectRef>
+          <a:fontRef idx="minor">
+            <a:schemeClr val="lt1"/>
+          </a:fontRef>
+        </p:style>
+        <p:txBody>
+          <a:bodyPr rtlCol="0" anchor="ctr"/>
+          <a:lstStyle/>
+          <a:p>
+            <a:pPr algn="ctr"/>
+          </a:p>
+        </p:txBody>
+      </p:sp>
     </p:spTree>
   </p:cSld>
   <p:clrMapOvr>
@@ -7056,6 +7540,94 @@
           </a:p>
         </p:txBody>
       </p:sp>
+      <p:sp>
+        <p:nvSpPr>
+          <p:cNvPr id="43" name="AICOE_GEO_ACCENT_Right Triangle 42"/>
+          <p:cNvSpPr/>
+          <p:nvPr/>
+        </p:nvSpPr>
+        <p:spPr>
+          <a:xfrm rot="5400000">
+            <a:off x="11762232" y="109728"/>
+            <a:ext cx="320040" cy="320040"/>
+          </a:xfrm>
+          <a:prstGeom prst="rtTriangle">
+            <a:avLst/>
+          </a:prstGeom>
+          <a:solidFill>
+            <a:srgbClr val="0B1F3A"/>
+          </a:solidFill>
+          <a:ln>
+            <a:noFill/>
+          </a:ln>
+          <a:effectLst/>
+        </p:spPr>
+        <p:style>
+          <a:lnRef idx="1">
+            <a:schemeClr val="accent1"/>
+          </a:lnRef>
+          <a:fillRef idx="3">
+            <a:schemeClr val="accent1"/>
+          </a:fillRef>
+          <a:effectRef idx="2">
+            <a:schemeClr val="accent1"/>
+          </a:effectRef>
+          <a:fontRef idx="minor">
+            <a:schemeClr val="lt1"/>
+          </a:fontRef>
+        </p:style>
+        <p:txBody>
+          <a:bodyPr rtlCol="0" anchor="ctr"/>
+          <a:lstStyle/>
+          <a:p>
+            <a:pPr algn="ctr"/>
+          </a:p>
+        </p:txBody>
+      </p:sp>
+      <p:sp>
+        <p:nvSpPr>
+          <p:cNvPr id="44" name="AICOE_GEO_ACCENT_Right Triangle 43"/>
+          <p:cNvSpPr/>
+          <p:nvPr/>
+        </p:nvSpPr>
+        <p:spPr>
+          <a:xfrm rot="5400000">
+            <a:off x="11874246" y="109728"/>
+            <a:ext cx="208026" cy="208026"/>
+          </a:xfrm>
+          <a:prstGeom prst="rtTriangle">
+            <a:avLst/>
+          </a:prstGeom>
+          <a:solidFill>
+            <a:srgbClr val="50E6FF"/>
+          </a:solidFill>
+          <a:ln>
+            <a:noFill/>
+          </a:ln>
+          <a:effectLst/>
+        </p:spPr>
+        <p:style>
+          <a:lnRef idx="1">
+            <a:schemeClr val="accent1"/>
+          </a:lnRef>
+          <a:fillRef idx="3">
+            <a:schemeClr val="accent1"/>
+          </a:fillRef>
+          <a:effectRef idx="2">
+            <a:schemeClr val="accent1"/>
+          </a:effectRef>
+          <a:fontRef idx="minor">
+            <a:schemeClr val="lt1"/>
+          </a:fontRef>
+        </p:style>
+        <p:txBody>
+          <a:bodyPr rtlCol="0" anchor="ctr"/>
+          <a:lstStyle/>
+          <a:p>
+            <a:pPr algn="ctr"/>
+          </a:p>
+        </p:txBody>
+      </p:sp>
     </p:spTree>
   </p:cSld>
   <p:clrMapOvr>
@@ -8507,6 +9079,94 @@
           </a:p>
         </p:txBody>
       </p:sp>
+      <p:sp>
+        <p:nvSpPr>
+          <p:cNvPr id="41" name="AICOE_GEO_ACCENT_Right Triangle 40"/>
+          <p:cNvSpPr/>
+          <p:nvPr/>
+        </p:nvSpPr>
+        <p:spPr>
+          <a:xfrm rot="5400000">
+            <a:off x="11762232" y="109728"/>
+            <a:ext cx="320040" cy="320040"/>
+          </a:xfrm>
+          <a:prstGeom prst="rtTriangle">
+            <a:avLst/>
+          </a:prstGeom>
+          <a:solidFill>
+            <a:srgbClr val="0B1F3A"/>
+          </a:solidFill>
+          <a:ln>
+            <a:noFill/>
+          </a:ln>
+          <a:effectLst/>
+        </p:spPr>
+        <p:style>
+          <a:lnRef idx="1">
+            <a:schemeClr val="accent1"/>
+          </a:lnRef>
+          <a:fillRef idx="3">
+            <a:schemeClr val="accent1"/>
+          </a:fillRef>
+          <a:effectRef idx="2">
+            <a:schemeClr val="accent1"/>
+          </a:effectRef>
+          <a:fontRef idx="minor">
+            <a:schemeClr val="lt1"/>
+          </a:fontRef>
+        </p:style>
+        <p:txBody>
+          <a:bodyPr rtlCol="0" anchor="ctr"/>
+          <a:lstStyle/>
+          <a:p>
+            <a:pPr algn="ctr"/>
+          </a:p>
+        </p:txBody>
+      </p:sp>
+      <p:sp>
+        <p:nvSpPr>
+          <p:cNvPr id="42" name="AICOE_GEO_ACCENT_Right Triangle 41"/>
+          <p:cNvSpPr/>
+          <p:nvPr/>
+        </p:nvSpPr>
+        <p:spPr>
+          <a:xfrm rot="5400000">
+            <a:off x="11874246" y="109728"/>
+            <a:ext cx="208026" cy="208026"/>
+          </a:xfrm>
+          <a:prstGeom prst="rtTriangle">
+            <a:avLst/>
+          </a:prstGeom>
+          <a:solidFill>
+            <a:srgbClr val="50E6FF"/>
+          </a:solidFill>
+          <a:ln>
+            <a:noFill/>
+          </a:ln>
+          <a:effectLst/>
+        </p:spPr>
+        <p:style>
+          <a:lnRef idx="1">
+            <a:schemeClr val="accent1"/>
+          </a:lnRef>
+          <a:fillRef idx="3">
+            <a:schemeClr val="accent1"/>
+          </a:fillRef>
+          <a:effectRef idx="2">
+            <a:schemeClr val="accent1"/>
+          </a:effectRef>
+          <a:fontRef idx="minor">
+            <a:schemeClr val="lt1"/>
+          </a:fontRef>
+        </p:style>
+        <p:txBody>
+          <a:bodyPr rtlCol="0" anchor="ctr"/>
+          <a:lstStyle/>
+          <a:p>
+            <a:pPr algn="ctr"/>
+          </a:p>
+        </p:txBody>
+      </p:sp>
     </p:spTree>
   </p:cSld>
   <p:clrMapOvr>
@@ -9393,6 +10053,94 @@
           </a:p>
         </p:txBody>
       </p:sp>
+      <p:sp>
+        <p:nvSpPr>
+          <p:cNvPr id="25" name="AICOE_GEO_ACCENT_Right Triangle 24"/>
+          <p:cNvSpPr/>
+          <p:nvPr/>
+        </p:nvSpPr>
+        <p:spPr>
+          <a:xfrm rot="5400000">
+            <a:off x="11762232" y="109728"/>
+            <a:ext cx="320040" cy="320040"/>
+          </a:xfrm>
+          <a:prstGeom prst="rtTriangle">
+            <a:avLst/>
+          </a:prstGeom>
+          <a:solidFill>
+            <a:srgbClr val="0B1F3A"/>
+          </a:solidFill>
+          <a:ln>
+            <a:noFill/>
+          </a:ln>
+          <a:effectLst/>
+        </p:spPr>
+        <p:style>
+          <a:lnRef idx="1">
+            <a:schemeClr val="accent1"/>
+          </a:lnRef>
+          <a:fillRef idx="3">
+            <a:schemeClr val="accent1"/>
+          </a:fillRef>
+          <a:effectRef idx="2">
+            <a:schemeClr val="accent1"/>
+          </a:effectRef>
+          <a:fontRef idx="minor">
+            <a:schemeClr val="lt1"/>
+          </a:fontRef>
+        </p:style>
+        <p:txBody>
+          <a:bodyPr rtlCol="0" anchor="ctr"/>
+          <a:lstStyle/>
+          <a:p>
+            <a:pPr algn="ctr"/>
+          </a:p>
+        </p:txBody>
+      </p:sp>
+      <p:sp>
+        <p:nvSpPr>
+          <p:cNvPr id="26" name="AICOE_GEO_ACCENT_Right Triangle 25"/>
+          <p:cNvSpPr/>
+          <p:nvPr/>
+        </p:nvSpPr>
+        <p:spPr>
+          <a:xfrm rot="5400000">
+            <a:off x="11874246" y="109728"/>
+            <a:ext cx="208026" cy="208026"/>
+          </a:xfrm>
+          <a:prstGeom prst="rtTriangle">
+            <a:avLst/>
+          </a:prstGeom>
+          <a:solidFill>
+            <a:srgbClr val="50E6FF"/>
+          </a:solidFill>
+          <a:ln>
+            <a:noFill/>
+          </a:ln>
+          <a:effectLst/>
+        </p:spPr>
+        <p:style>
+          <a:lnRef idx="1">
+            <a:schemeClr val="accent1"/>
+          </a:lnRef>
+          <a:fillRef idx="3">
+            <a:schemeClr val="accent1"/>
+          </a:fillRef>
+          <a:effectRef idx="2">
+            <a:schemeClr val="accent1"/>
+          </a:effectRef>
+          <a:fontRef idx="minor">
+            <a:schemeClr val="lt1"/>
+          </a:fontRef>
+        </p:style>
+        <p:txBody>
+          <a:bodyPr rtlCol="0" anchor="ctr"/>
+          <a:lstStyle/>
+          <a:p>
+            <a:pPr algn="ctr"/>
+          </a:p>
+        </p:txBody>
+      </p:sp>
     </p:spTree>
   </p:cSld>
   <p:clrMapOvr>
@@ -10287,6 +11035,94 @@
           </a:p>
         </p:txBody>
       </p:sp>
+      <p:sp>
+        <p:nvSpPr>
+          <p:cNvPr id="26" name="AICOE_GEO_ACCENT_Right Triangle 25"/>
+          <p:cNvSpPr/>
+          <p:nvPr/>
+        </p:nvSpPr>
+        <p:spPr>
+          <a:xfrm rot="5400000">
+            <a:off x="11762232" y="109728"/>
+            <a:ext cx="320040" cy="320040"/>
+          </a:xfrm>
+          <a:prstGeom prst="rtTriangle">
+            <a:avLst/>
+          </a:prstGeom>
+          <a:solidFill>
+            <a:srgbClr val="0B1F3A"/>
+          </a:solidFill>
+          <a:ln>
+            <a:noFill/>
+          </a:ln>
+          <a:effectLst/>
+        </p:spPr>
+        <p:style>
+          <a:lnRef idx="1">
+            <a:schemeClr val="accent1"/>
+          </a:lnRef>
+          <a:fillRef idx="3">
+            <a:schemeClr val="accent1"/>
+          </a:fillRef>
+          <a:effectRef idx="2">
+            <a:schemeClr val="accent1"/>
+          </a:effectRef>
+          <a:fontRef idx="minor">
+            <a:schemeClr val="lt1"/>
+          </a:fontRef>
+        </p:style>
+        <p:txBody>
+          <a:bodyPr rtlCol="0" anchor="ctr"/>
+          <a:lstStyle/>
+          <a:p>
+            <a:pPr algn="ctr"/>
+          </a:p>
+        </p:txBody>
+      </p:sp>
+      <p:sp>
+        <p:nvSpPr>
+          <p:cNvPr id="27" name="AICOE_GEO_ACCENT_Right Triangle 26"/>
+          <p:cNvSpPr/>
+          <p:nvPr/>
+        </p:nvSpPr>
+        <p:spPr>
+          <a:xfrm rot="5400000">
+            <a:off x="11874246" y="109728"/>
+            <a:ext cx="208026" cy="208026"/>
+          </a:xfrm>
+          <a:prstGeom prst="rtTriangle">
+            <a:avLst/>
+          </a:prstGeom>
+          <a:solidFill>
+            <a:srgbClr val="50E6FF"/>
+          </a:solidFill>
+          <a:ln>
+            <a:noFill/>
+          </a:ln>
+          <a:effectLst/>
+        </p:spPr>
+        <p:style>
+          <a:lnRef idx="1">
+            <a:schemeClr val="accent1"/>
+          </a:lnRef>
+          <a:fillRef idx="3">
+            <a:schemeClr val="accent1"/>
+          </a:fillRef>
+          <a:effectRef idx="2">
+            <a:schemeClr val="accent1"/>
+          </a:effectRef>
+          <a:fontRef idx="minor">
+            <a:schemeClr val="lt1"/>
+          </a:fontRef>
+        </p:style>
+        <p:txBody>
+          <a:bodyPr rtlCol="0" anchor="ctr"/>
+          <a:lstStyle/>
+          <a:p>
+            <a:pPr algn="ctr"/>
+          </a:p>
+        </p:txBody>
+      </p:sp>
     </p:spTree>
   </p:cSld>
   <p:clrMapOvr>
@@ -11625,6 +12461,94 @@
           </a:p>
         </p:txBody>
       </p:sp>
+      <p:sp>
+        <p:nvSpPr>
+          <p:cNvPr id="38" name="AICOE_GEO_ACCENT_Right Triangle 37"/>
+          <p:cNvSpPr/>
+          <p:nvPr/>
+        </p:nvSpPr>
+        <p:spPr>
+          <a:xfrm rot="5400000">
+            <a:off x="11762232" y="109728"/>
+            <a:ext cx="320040" cy="320040"/>
+          </a:xfrm>
+          <a:prstGeom prst="rtTriangle">
+            <a:avLst/>
+          </a:prstGeom>
+          <a:solidFill>
+            <a:srgbClr val="0B1F3A"/>
+          </a:solidFill>
+          <a:ln>
+            <a:noFill/>
+          </a:ln>
+          <a:effectLst/>
+        </p:spPr>
+        <p:style>
+          <a:lnRef idx="1">
+            <a:schemeClr val="accent1"/>
+          </a:lnRef>
+          <a:fillRef idx="3">
+            <a:schemeClr val="accent1"/>
+          </a:fillRef>
+          <a:effectRef idx="2">
+            <a:schemeClr val="accent1"/>
+          </a:effectRef>
+          <a:fontRef idx="minor">
+            <a:schemeClr val="lt1"/>
+          </a:fontRef>
+        </p:style>
+        <p:txBody>
+          <a:bodyPr rtlCol="0" anchor="ctr"/>
+          <a:lstStyle/>
+          <a:p>
+            <a:pPr algn="ctr"/>
+          </a:p>
+        </p:txBody>
+      </p:sp>
+      <p:sp>
+        <p:nvSpPr>
+          <p:cNvPr id="39" name="AICOE_GEO_ACCENT_Right Triangle 38"/>
+          <p:cNvSpPr/>
+          <p:nvPr/>
+        </p:nvSpPr>
+        <p:spPr>
+          <a:xfrm rot="5400000">
+            <a:off x="11874246" y="109728"/>
+            <a:ext cx="208026" cy="208026"/>
+          </a:xfrm>
+          <a:prstGeom prst="rtTriangle">
+            <a:avLst/>
+          </a:prstGeom>
+          <a:solidFill>
+            <a:srgbClr val="50E6FF"/>
+          </a:solidFill>
+          <a:ln>
+            <a:noFill/>
+          </a:ln>
+          <a:effectLst/>
+        </p:spPr>
+        <p:style>
+          <a:lnRef idx="1">
+            <a:schemeClr val="accent1"/>
+          </a:lnRef>
+          <a:fillRef idx="3">
+            <a:schemeClr val="accent1"/>
+          </a:fillRef>
+          <a:effectRef idx="2">
+            <a:schemeClr val="accent1"/>
+          </a:effectRef>
+          <a:fontRef idx="minor">
+            <a:schemeClr val="lt1"/>
+          </a:fontRef>
+        </p:style>
+        <p:txBody>
+          <a:bodyPr rtlCol="0" anchor="ctr"/>
+          <a:lstStyle/>
+          <a:p>
+            <a:pPr algn="ctr"/>
+          </a:p>
+        </p:txBody>
+      </p:sp>
     </p:spTree>
   </p:cSld>
   <p:clrMapOvr>
@@ -13002,6 +13926,94 @@
           </a:p>
         </p:txBody>
       </p:sp>
+      <p:sp>
+        <p:nvSpPr>
+          <p:cNvPr id="39" name="AICOE_GEO_ACCENT_Right Triangle 38"/>
+          <p:cNvSpPr/>
+          <p:nvPr/>
+        </p:nvSpPr>
+        <p:spPr>
+          <a:xfrm rot="5400000">
+            <a:off x="11762232" y="109728"/>
+            <a:ext cx="320040" cy="320040"/>
+          </a:xfrm>
+          <a:prstGeom prst="rtTriangle">
+            <a:avLst/>
+          </a:prstGeom>
+          <a:solidFill>
+            <a:srgbClr val="0B1F3A"/>
+          </a:solidFill>
+          <a:ln>
+            <a:noFill/>
+          </a:ln>
+          <a:effectLst/>
+        </p:spPr>
+        <p:style>
+          <a:lnRef idx="1">
+            <a:schemeClr val="accent1"/>
+          </a:lnRef>
+          <a:fillRef idx="3">
+            <a:schemeClr val="accent1"/>
+          </a:fillRef>
+          <a:effectRef idx="2">
+            <a:schemeClr val="accent1"/>
+          </a:effectRef>
+          <a:fontRef idx="minor">
+            <a:schemeClr val="lt1"/>
+          </a:fontRef>
+        </p:style>
+        <p:txBody>
+          <a:bodyPr rtlCol="0" anchor="ctr"/>
+          <a:lstStyle/>
+          <a:p>
+            <a:pPr algn="ctr"/>
+          </a:p>
+        </p:txBody>
+      </p:sp>
+      <p:sp>
+        <p:nvSpPr>
+          <p:cNvPr id="40" name="AICOE_GEO_ACCENT_Right Triangle 39"/>
+          <p:cNvSpPr/>
+          <p:nvPr/>
+        </p:nvSpPr>
+        <p:spPr>
+          <a:xfrm rot="5400000">
+            <a:off x="11874246" y="109728"/>
+            <a:ext cx="208026" cy="208026"/>
+          </a:xfrm>
+          <a:prstGeom prst="rtTriangle">
+            <a:avLst/>
+          </a:prstGeom>
+          <a:solidFill>
+            <a:srgbClr val="50E6FF"/>
+          </a:solidFill>
+          <a:ln>
+            <a:noFill/>
+          </a:ln>
+          <a:effectLst/>
+        </p:spPr>
+        <p:style>
+          <a:lnRef idx="1">
+            <a:schemeClr val="accent1"/>
+          </a:lnRef>
+          <a:fillRef idx="3">
+            <a:schemeClr val="accent1"/>
+          </a:fillRef>
+          <a:effectRef idx="2">
+            <a:schemeClr val="accent1"/>
+          </a:effectRef>
+          <a:fontRef idx="minor">
+            <a:schemeClr val="lt1"/>
+          </a:fontRef>
+        </p:style>
+        <p:txBody>
+          <a:bodyPr rtlCol="0" anchor="ctr"/>
+          <a:lstStyle/>
+          <a:p>
+            <a:pPr algn="ctr"/>
+          </a:p>
+        </p:txBody>
+      </p:sp>
     </p:spTree>
   </p:cSld>
   <p:clrMapOvr>
@@ -14058,6 +15070,94 @@
           </a:p>
         </p:txBody>
       </p:sp>
+      <p:sp>
+        <p:nvSpPr>
+          <p:cNvPr id="30" name="AICOE_GEO_ACCENT_Right Triangle 29"/>
+          <p:cNvSpPr/>
+          <p:nvPr/>
+        </p:nvSpPr>
+        <p:spPr>
+          <a:xfrm rot="5400000">
+            <a:off x="11762232" y="109728"/>
+            <a:ext cx="320040" cy="320040"/>
+          </a:xfrm>
+          <a:prstGeom prst="rtTriangle">
+            <a:avLst/>
+          </a:prstGeom>
+          <a:solidFill>
+            <a:srgbClr val="0B1F3A"/>
+          </a:solidFill>
+          <a:ln>
+            <a:noFill/>
+          </a:ln>
+          <a:effectLst/>
+        </p:spPr>
+        <p:style>
+          <a:lnRef idx="1">
+            <a:schemeClr val="accent1"/>
+          </a:lnRef>
+          <a:fillRef idx="3">
+            <a:schemeClr val="accent1"/>
+          </a:fillRef>
+          <a:effectRef idx="2">
+            <a:schemeClr val="accent1"/>
+          </a:effectRef>
+          <a:fontRef idx="minor">
+            <a:schemeClr val="lt1"/>
+          </a:fontRef>
+        </p:style>
+        <p:txBody>
+          <a:bodyPr rtlCol="0" anchor="ctr"/>
+          <a:lstStyle/>
+          <a:p>
+            <a:pPr algn="ctr"/>
+          </a:p>
+        </p:txBody>
+      </p:sp>
+      <p:sp>
+        <p:nvSpPr>
+          <p:cNvPr id="31" name="AICOE_GEO_ACCENT_Right Triangle 30"/>
+          <p:cNvSpPr/>
+          <p:nvPr/>
+        </p:nvSpPr>
+        <p:spPr>
+          <a:xfrm rot="5400000">
+            <a:off x="11874246" y="109728"/>
+            <a:ext cx="208026" cy="208026"/>
+          </a:xfrm>
+          <a:prstGeom prst="rtTriangle">
+            <a:avLst/>
+          </a:prstGeom>
+          <a:solidFill>
+            <a:srgbClr val="50E6FF"/>
+          </a:solidFill>
+          <a:ln>
+            <a:noFill/>
+          </a:ln>
+          <a:effectLst/>
+        </p:spPr>
+        <p:style>
+          <a:lnRef idx="1">
+            <a:schemeClr val="accent1"/>
+          </a:lnRef>
+          <a:fillRef idx="3">
+            <a:schemeClr val="accent1"/>
+          </a:fillRef>
+          <a:effectRef idx="2">
+            <a:schemeClr val="accent1"/>
+          </a:effectRef>
+          <a:fontRef idx="minor">
+            <a:schemeClr val="lt1"/>
+          </a:fontRef>
+        </p:style>
+        <p:txBody>
+          <a:bodyPr rtlCol="0" anchor="ctr"/>
+          <a:lstStyle/>
+          <a:p>
+            <a:pPr algn="ctr"/>
+          </a:p>
+        </p:txBody>
+      </p:sp>
     </p:spTree>
   </p:cSld>
   <p:clrMapOvr>
@@ -15331,6 +16431,94 @@
           </a:p>
         </p:txBody>
       </p:sp>
+      <p:sp>
+        <p:nvSpPr>
+          <p:cNvPr id="37" name="AICOE_GEO_ACCENT_Right Triangle 36"/>
+          <p:cNvSpPr/>
+          <p:nvPr/>
+        </p:nvSpPr>
+        <p:spPr>
+          <a:xfrm rot="5400000">
+            <a:off x="11762232" y="109728"/>
+            <a:ext cx="320040" cy="320040"/>
+          </a:xfrm>
+          <a:prstGeom prst="rtTriangle">
+            <a:avLst/>
+          </a:prstGeom>
+          <a:solidFill>
+            <a:srgbClr val="0B1F3A"/>
+          </a:solidFill>
+          <a:ln>
+            <a:noFill/>
+          </a:ln>
+          <a:effectLst/>
+        </p:spPr>
+        <p:style>
+          <a:lnRef idx="1">
+            <a:schemeClr val="accent1"/>
+          </a:lnRef>
+          <a:fillRef idx="3">
+            <a:schemeClr val="accent1"/>
+          </a:fillRef>
+          <a:effectRef idx="2">
+            <a:schemeClr val="accent1"/>
+          </a:effectRef>
+          <a:fontRef idx="minor">
+            <a:schemeClr val="lt1"/>
+          </a:fontRef>
+        </p:style>
+        <p:txBody>
+          <a:bodyPr rtlCol="0" anchor="ctr"/>
+          <a:lstStyle/>
+          <a:p>
+            <a:pPr algn="ctr"/>
+          </a:p>
+        </p:txBody>
+      </p:sp>
+      <p:sp>
+        <p:nvSpPr>
+          <p:cNvPr id="38" name="AICOE_GEO_ACCENT_Right Triangle 37"/>
+          <p:cNvSpPr/>
+          <p:nvPr/>
+        </p:nvSpPr>
+        <p:spPr>
+          <a:xfrm rot="5400000">
+            <a:off x="11874246" y="109728"/>
+            <a:ext cx="208026" cy="208026"/>
+          </a:xfrm>
+          <a:prstGeom prst="rtTriangle">
+            <a:avLst/>
+          </a:prstGeom>
+          <a:solidFill>
+            <a:srgbClr val="50E6FF"/>
+          </a:solidFill>
+          <a:ln>
+            <a:noFill/>
+          </a:ln>
+          <a:effectLst/>
+        </p:spPr>
+        <p:style>
+          <a:lnRef idx="1">
+            <a:schemeClr val="accent1"/>
+          </a:lnRef>
+          <a:fillRef idx="3">
+            <a:schemeClr val="accent1"/>
+          </a:fillRef>
+          <a:effectRef idx="2">
+            <a:schemeClr val="accent1"/>
+          </a:effectRef>
+          <a:fontRef idx="minor">
+            <a:schemeClr val="lt1"/>
+          </a:fontRef>
+        </p:style>
+        <p:txBody>
+          <a:bodyPr rtlCol="0" anchor="ctr"/>
+          <a:lstStyle/>
+          <a:p>
+            <a:pPr algn="ctr"/>
+          </a:p>
+        </p:txBody>
+      </p:sp>
     </p:spTree>
   </p:cSld>
   <p:clrMapOvr>
@@ -16506,6 +17694,94 @@
           </a:p>
         </p:txBody>
       </p:sp>
+      <p:sp>
+        <p:nvSpPr>
+          <p:cNvPr id="33" name="AICOE_GEO_ACCENT_Right Triangle 32"/>
+          <p:cNvSpPr/>
+          <p:nvPr/>
+        </p:nvSpPr>
+        <p:spPr>
+          <a:xfrm rot="5400000">
+            <a:off x="11762232" y="109728"/>
+            <a:ext cx="320040" cy="320040"/>
+          </a:xfrm>
+          <a:prstGeom prst="rtTriangle">
+            <a:avLst/>
+          </a:prstGeom>
+          <a:solidFill>
+            <a:srgbClr val="0B1F3A"/>
+          </a:solidFill>
+          <a:ln>
+            <a:noFill/>
+          </a:ln>
+          <a:effectLst/>
+        </p:spPr>
+        <p:style>
+          <a:lnRef idx="1">
+            <a:schemeClr val="accent1"/>
+          </a:lnRef>
+          <a:fillRef idx="3">
+            <a:schemeClr val="accent1"/>
+          </a:fillRef>
+          <a:effectRef idx="2">
+            <a:schemeClr val="accent1"/>
+          </a:effectRef>
+          <a:fontRef idx="minor">
+            <a:schemeClr val="lt1"/>
+          </a:fontRef>
+        </p:style>
+        <p:txBody>
+          <a:bodyPr rtlCol="0" anchor="ctr"/>
+          <a:lstStyle/>
+          <a:p>
+            <a:pPr algn="ctr"/>
+          </a:p>
+        </p:txBody>
+      </p:sp>
+      <p:sp>
+        <p:nvSpPr>
+          <p:cNvPr id="34" name="AICOE_GEO_ACCENT_Right Triangle 33"/>
+          <p:cNvSpPr/>
+          <p:nvPr/>
+        </p:nvSpPr>
+        <p:spPr>
+          <a:xfrm rot="5400000">
+            <a:off x="11874246" y="109728"/>
+            <a:ext cx="208026" cy="208026"/>
+          </a:xfrm>
+          <a:prstGeom prst="rtTriangle">
+            <a:avLst/>
+          </a:prstGeom>
+          <a:solidFill>
+            <a:srgbClr val="50E6FF"/>
+          </a:solidFill>
+          <a:ln>
+            <a:noFill/>
+          </a:ln>
+          <a:effectLst/>
+        </p:spPr>
+        <p:style>
+          <a:lnRef idx="1">
+            <a:schemeClr val="accent1"/>
+          </a:lnRef>
+          <a:fillRef idx="3">
+            <a:schemeClr val="accent1"/>
+          </a:fillRef>
+          <a:effectRef idx="2">
+            <a:schemeClr val="accent1"/>
+          </a:effectRef>
+          <a:fontRef idx="minor">
+            <a:schemeClr val="lt1"/>
+          </a:fontRef>
+        </p:style>
+        <p:txBody>
+          <a:bodyPr rtlCol="0" anchor="ctr"/>
+          <a:lstStyle/>
+          <a:p>
+            <a:pPr algn="ctr"/>
+          </a:p>
+        </p:txBody>
+      </p:sp>
     </p:spTree>
   </p:cSld>
   <p:clrMapOvr>
@@ -17478,6 +18754,94 @@
           </a:p>
         </p:txBody>
       </p:sp>
+      <p:sp>
+        <p:nvSpPr>
+          <p:cNvPr id="28" name="AICOE_GEO_ACCENT_Right Triangle 27"/>
+          <p:cNvSpPr/>
+          <p:nvPr/>
+        </p:nvSpPr>
+        <p:spPr>
+          <a:xfrm rot="5400000">
+            <a:off x="11762232" y="109728"/>
+            <a:ext cx="320040" cy="320040"/>
+          </a:xfrm>
+          <a:prstGeom prst="rtTriangle">
+            <a:avLst/>
+          </a:prstGeom>
+          <a:solidFill>
+            <a:srgbClr val="0B1F3A"/>
+          </a:solidFill>
+          <a:ln>
+            <a:noFill/>
+          </a:ln>
+          <a:effectLst/>
+        </p:spPr>
+        <p:style>
+          <a:lnRef idx="1">
+            <a:schemeClr val="accent1"/>
+          </a:lnRef>
+          <a:fillRef idx="3">
+            <a:schemeClr val="accent1"/>
+          </a:fillRef>
+          <a:effectRef idx="2">
+            <a:schemeClr val="accent1"/>
+          </a:effectRef>
+          <a:fontRef idx="minor">
+            <a:schemeClr val="lt1"/>
+          </a:fontRef>
+        </p:style>
+        <p:txBody>
+          <a:bodyPr rtlCol="0" anchor="ctr"/>
+          <a:lstStyle/>
+          <a:p>
+            <a:pPr algn="ctr"/>
+          </a:p>
+        </p:txBody>
+      </p:sp>
+      <p:sp>
+        <p:nvSpPr>
+          <p:cNvPr id="29" name="AICOE_GEO_ACCENT_Right Triangle 28"/>
+          <p:cNvSpPr/>
+          <p:nvPr/>
+        </p:nvSpPr>
+        <p:spPr>
+          <a:xfrm rot="5400000">
+            <a:off x="11874246" y="109728"/>
+            <a:ext cx="208026" cy="208026"/>
+          </a:xfrm>
+          <a:prstGeom prst="rtTriangle">
+            <a:avLst/>
+          </a:prstGeom>
+          <a:solidFill>
+            <a:srgbClr val="50E6FF"/>
+          </a:solidFill>
+          <a:ln>
+            <a:noFill/>
+          </a:ln>
+          <a:effectLst/>
+        </p:spPr>
+        <p:style>
+          <a:lnRef idx="1">
+            <a:schemeClr val="accent1"/>
+          </a:lnRef>
+          <a:fillRef idx="3">
+            <a:schemeClr val="accent1"/>
+          </a:fillRef>
+          <a:effectRef idx="2">
+            <a:schemeClr val="accent1"/>
+          </a:effectRef>
+          <a:fontRef idx="minor">
+            <a:schemeClr val="lt1"/>
+          </a:fontRef>
+        </p:style>
+        <p:txBody>
+          <a:bodyPr rtlCol="0" anchor="ctr"/>
+          <a:lstStyle/>
+          <a:p>
+            <a:pPr algn="ctr"/>
+          </a:p>
+        </p:txBody>
+      </p:sp>
     </p:spTree>
   </p:cSld>
   <p:clrMapOvr>
@@ -19093,6 +20457,94 @@
               <a:t>9 / 15</a:t>
             </a:r>
             <a:endParaRPr lang="en-US" sz="900" dirty="0"/>
+          </a:p>
+        </p:txBody>
+      </p:sp>
+      <p:sp>
+        <p:nvSpPr>
+          <p:cNvPr id="46" name="AICOE_GEO_ACCENT_Right Triangle 45"/>
+          <p:cNvSpPr/>
+          <p:nvPr/>
+        </p:nvSpPr>
+        <p:spPr>
+          <a:xfrm rot="5400000">
+            <a:off x="11762232" y="109728"/>
+            <a:ext cx="320040" cy="320040"/>
+          </a:xfrm>
+          <a:prstGeom prst="rtTriangle">
+            <a:avLst/>
+          </a:prstGeom>
+          <a:solidFill>
+            <a:srgbClr val="0B1F3A"/>
+          </a:solidFill>
+          <a:ln>
+            <a:noFill/>
+          </a:ln>
+          <a:effectLst/>
+        </p:spPr>
+        <p:style>
+          <a:lnRef idx="1">
+            <a:schemeClr val="accent1"/>
+          </a:lnRef>
+          <a:fillRef idx="3">
+            <a:schemeClr val="accent1"/>
+          </a:fillRef>
+          <a:effectRef idx="2">
+            <a:schemeClr val="accent1"/>
+          </a:effectRef>
+          <a:fontRef idx="minor">
+            <a:schemeClr val="lt1"/>
+          </a:fontRef>
+        </p:style>
+        <p:txBody>
+          <a:bodyPr rtlCol="0" anchor="ctr"/>
+          <a:lstStyle/>
+          <a:p>
+            <a:pPr algn="ctr"/>
+          </a:p>
+        </p:txBody>
+      </p:sp>
+      <p:sp>
+        <p:nvSpPr>
+          <p:cNvPr id="47" name="AICOE_GEO_ACCENT_Right Triangle 46"/>
+          <p:cNvSpPr/>
+          <p:nvPr/>
+        </p:nvSpPr>
+        <p:spPr>
+          <a:xfrm rot="5400000">
+            <a:off x="11874246" y="109728"/>
+            <a:ext cx="208026" cy="208026"/>
+          </a:xfrm>
+          <a:prstGeom prst="rtTriangle">
+            <a:avLst/>
+          </a:prstGeom>
+          <a:solidFill>
+            <a:srgbClr val="50E6FF"/>
+          </a:solidFill>
+          <a:ln>
+            <a:noFill/>
+          </a:ln>
+          <a:effectLst/>
+        </p:spPr>
+        <p:style>
+          <a:lnRef idx="1">
+            <a:schemeClr val="accent1"/>
+          </a:lnRef>
+          <a:fillRef idx="3">
+            <a:schemeClr val="accent1"/>
+          </a:fillRef>
+          <a:effectRef idx="2">
+            <a:schemeClr val="accent1"/>
+          </a:effectRef>
+          <a:fontRef idx="minor">
+            <a:schemeClr val="lt1"/>
+          </a:fontRef>
+        </p:style>
+        <p:txBody>
+          <a:bodyPr rtlCol="0" anchor="ctr"/>
+          <a:lstStyle/>
+          <a:p>
+            <a:pPr algn="ctr"/>
           </a:p>
         </p:txBody>
       </p:sp>
